--- a/ai/src/ppt dataset/Brown Green Aesthetic Group Project Presentation.pptx
+++ b/ai/src/ppt dataset/Brown Green Aesthetic Group Project Presentation.pptx
@@ -3138,6 +3138,10 @@
             </a:stretch>
           </a:blipFill>
         </p:spPr>
+        <p:txBody>
+          <a:bodyPr/>
+          <a:p/>
+        </p:txBody>
       </p:sp>
       <p:sp>
         <p:nvSpPr>
@@ -3190,6 +3194,10 @@
             </a:stretch>
           </a:blipFill>
         </p:spPr>
+        <p:txBody>
+          <a:bodyPr/>
+          <a:p/>
+        </p:txBody>
       </p:sp>
       <p:sp>
         <p:nvSpPr>
@@ -3242,6 +3250,10 @@
             </a:stretch>
           </a:blipFill>
         </p:spPr>
+        <p:txBody>
+          <a:bodyPr/>
+          <a:p/>
+        </p:txBody>
       </p:sp>
       <p:sp>
         <p:nvSpPr>
@@ -3294,6 +3306,10 @@
             </a:stretch>
           </a:blipFill>
         </p:spPr>
+        <p:txBody>
+          <a:bodyPr/>
+          <a:p/>
+        </p:txBody>
       </p:sp>
       <p:sp>
         <p:nvSpPr>
@@ -3346,6 +3362,10 @@
             </a:stretch>
           </a:blipFill>
         </p:spPr>
+        <p:txBody>
+          <a:bodyPr/>
+          <a:p/>
+        </p:txBody>
       </p:sp>
       <p:sp>
         <p:nvSpPr>
@@ -3398,6 +3418,10 @@
             </a:stretch>
           </a:blipFill>
         </p:spPr>
+        <p:txBody>
+          <a:bodyPr/>
+          <a:p/>
+        </p:txBody>
       </p:sp>
       <p:sp>
         <p:nvSpPr>
@@ -3450,6 +3474,10 @@
             </a:stretch>
           </a:blipFill>
         </p:spPr>
+        <p:txBody>
+          <a:bodyPr/>
+          <a:p/>
+        </p:txBody>
       </p:sp>
       <p:sp>
         <p:nvSpPr>
@@ -3502,6 +3530,10 @@
             </a:stretch>
           </a:blipFill>
         </p:spPr>
+        <p:txBody>
+          <a:bodyPr/>
+          <a:p/>
+        </p:txBody>
       </p:sp>
       <p:sp>
         <p:nvSpPr>
@@ -3554,6 +3586,10 @@
             </a:stretch>
           </a:blipFill>
         </p:spPr>
+        <p:txBody>
+          <a:bodyPr/>
+          <a:p/>
+        </p:txBody>
       </p:sp>
       <p:sp>
         <p:nvSpPr>
@@ -3606,6 +3642,10 @@
             </a:stretch>
           </a:blipFill>
         </p:spPr>
+        <p:txBody>
+          <a:bodyPr/>
+          <a:p/>
+        </p:txBody>
       </p:sp>
       <p:sp>
         <p:nvSpPr>
@@ -3627,25 +3667,7 @@
             <a:spAutoFit/>
           </a:bodyPr>
           <a:lstStyle/>
-          <a:p>
-            <a:pPr algn="ctr">
-              <a:lnSpc>
-                <a:spcPts val="14215"/>
-              </a:lnSpc>
-            </a:pPr>
-            <a:r>
-              <a:rPr lang="en-US" sz="16923">
-                <a:solidFill>
-                  <a:srgbClr val="6E4B37"/>
-                </a:solidFill>
-                <a:latin typeface="Libra Serif Modern"/>
-                <a:ea typeface="Libra Serif Modern"/>
-                <a:cs typeface="Libra Serif Modern"/>
-                <a:sym typeface="Libra Serif Modern"/>
-              </a:rPr>
-              <a:t>GROUP PROJECT</a:t>
-            </a:r>
-          </a:p>
+          <a:p/>
         </p:txBody>
       </p:sp>
       <p:sp>
@@ -3699,6 +3721,10 @@
             </a:stretch>
           </a:blipFill>
         </p:spPr>
+        <p:txBody>
+          <a:bodyPr/>
+          <a:p/>
+        </p:txBody>
       </p:sp>
       <p:sp>
         <p:nvSpPr>
@@ -3751,6 +3777,10 @@
             </a:stretch>
           </a:blipFill>
         </p:spPr>
+        <p:txBody>
+          <a:bodyPr/>
+          <a:p/>
+        </p:txBody>
       </p:sp>
       <p:sp>
         <p:nvSpPr>
@@ -3772,25 +3802,7 @@
             <a:spAutoFit/>
           </a:bodyPr>
           <a:lstStyle/>
-          <a:p>
-            <a:pPr algn="ctr">
-              <a:lnSpc>
-                <a:spcPts val="3399"/>
-              </a:lnSpc>
-            </a:pPr>
-            <a:r>
-              <a:rPr lang="en-US" sz="3399">
-                <a:solidFill>
-                  <a:srgbClr val="6E4B37"/>
-                </a:solidFill>
-                <a:latin typeface="Arimo"/>
-                <a:ea typeface="Arimo"/>
-                <a:cs typeface="Arimo"/>
-                <a:sym typeface="Arimo"/>
-              </a:rPr>
-              <a:t>Presented by Borcelle Group</a:t>
-            </a:r>
-          </a:p>
+          <a:p/>
         </p:txBody>
       </p:sp>
     </p:spTree>
@@ -3876,6 +3888,10 @@
             </a:stretch>
           </a:blipFill>
         </p:spPr>
+        <p:txBody>
+          <a:bodyPr/>
+          <a:p/>
+        </p:txBody>
       </p:sp>
       <p:sp>
         <p:nvSpPr>
@@ -3928,6 +3944,10 @@
             </a:stretch>
           </a:blipFill>
         </p:spPr>
+        <p:txBody>
+          <a:bodyPr/>
+          <a:p/>
+        </p:txBody>
       </p:sp>
       <p:sp>
         <p:nvSpPr>
@@ -3980,6 +4000,10 @@
             </a:stretch>
           </a:blipFill>
         </p:spPr>
+        <p:txBody>
+          <a:bodyPr/>
+          <a:p/>
+        </p:txBody>
       </p:sp>
       <p:sp>
         <p:nvSpPr>
@@ -4032,6 +4056,10 @@
             </a:stretch>
           </a:blipFill>
         </p:spPr>
+        <p:txBody>
+          <a:bodyPr/>
+          <a:p/>
+        </p:txBody>
       </p:sp>
       <p:sp>
         <p:nvSpPr>
@@ -4084,6 +4112,10 @@
             </a:stretch>
           </a:blipFill>
         </p:spPr>
+        <p:txBody>
+          <a:bodyPr/>
+          <a:p/>
+        </p:txBody>
       </p:sp>
       <p:sp>
         <p:nvSpPr>
@@ -4136,6 +4168,10 @@
             </a:stretch>
           </a:blipFill>
         </p:spPr>
+        <p:txBody>
+          <a:bodyPr/>
+          <a:p/>
+        </p:txBody>
       </p:sp>
       <p:sp>
         <p:nvSpPr>
@@ -4188,6 +4224,10 @@
             </a:stretch>
           </a:blipFill>
         </p:spPr>
+        <p:txBody>
+          <a:bodyPr/>
+          <a:p/>
+        </p:txBody>
       </p:sp>
       <p:sp>
         <p:nvSpPr>
@@ -4240,6 +4280,10 @@
             </a:stretch>
           </a:blipFill>
         </p:spPr>
+        <p:txBody>
+          <a:bodyPr/>
+          <a:p/>
+        </p:txBody>
       </p:sp>
       <p:sp>
         <p:nvSpPr>
@@ -4292,6 +4336,10 @@
             </a:stretch>
           </a:blipFill>
         </p:spPr>
+        <p:txBody>
+          <a:bodyPr/>
+          <a:p/>
+        </p:txBody>
       </p:sp>
       <p:sp>
         <p:nvSpPr>
@@ -4344,6 +4392,10 @@
             </a:stretch>
           </a:blipFill>
         </p:spPr>
+        <p:txBody>
+          <a:bodyPr/>
+          <a:p/>
+        </p:txBody>
       </p:sp>
       <p:sp>
         <p:nvSpPr>
@@ -4365,25 +4417,7 @@
             <a:spAutoFit/>
           </a:bodyPr>
           <a:lstStyle/>
-          <a:p>
-            <a:pPr algn="ctr">
-              <a:lnSpc>
-                <a:spcPts val="8418"/>
-              </a:lnSpc>
-            </a:pPr>
-            <a:r>
-              <a:rPr lang="en-US" sz="10021">
-                <a:solidFill>
-                  <a:srgbClr val="6E4B37"/>
-                </a:solidFill>
-                <a:latin typeface="Libra Serif Modern"/>
-                <a:ea typeface="Libra Serif Modern"/>
-                <a:cs typeface="Libra Serif Modern"/>
-                <a:sym typeface="Libra Serif Modern"/>
-              </a:rPr>
-              <a:t>RECOMMENDATION</a:t>
-            </a:r>
-          </a:p>
+          <a:p/>
         </p:txBody>
       </p:sp>
       <p:sp>
@@ -4406,25 +4440,7 @@
             <a:spAutoFit/>
           </a:bodyPr>
           <a:lstStyle/>
-          <a:p>
-            <a:pPr algn="ctr">
-              <a:lnSpc>
-                <a:spcPts val="3875"/>
-              </a:lnSpc>
-            </a:pPr>
-            <a:r>
-              <a:rPr lang="en-US" sz="3399">
-                <a:solidFill>
-                  <a:srgbClr val="6E4B37"/>
-                </a:solidFill>
-                <a:latin typeface="Arimo"/>
-                <a:ea typeface="Arimo"/>
-                <a:cs typeface="Arimo"/>
-                <a:sym typeface="Arimo"/>
-              </a:rPr>
-              <a:t>Lorem ipsum dolor sit amet, consectetur adipiscing elit. Duis viverra dui mauris, sed hendrerit mi cursus faucibus. Proin accumsan arcu eu tempus molestie. Nulla quis libero scelerisque, hendrerit ex eu, varius metus. Vestibulum scelerisque tellus velit, sed tempus massa venenatis eu. Duis sit amet elementum diam. Cras blandit feugiat arcu, id tempor dui finibus ac. Pellentesque faucibus feugiat nibh vel feugiat.</a:t>
-            </a:r>
-          </a:p>
+          <a:p/>
         </p:txBody>
       </p:sp>
     </p:spTree>
@@ -4510,6 +4526,10 @@
             </a:stretch>
           </a:blipFill>
         </p:spPr>
+        <p:txBody>
+          <a:bodyPr/>
+          <a:p/>
+        </p:txBody>
       </p:sp>
       <p:sp>
         <p:nvSpPr>
@@ -4562,6 +4582,10 @@
             </a:stretch>
           </a:blipFill>
         </p:spPr>
+        <p:txBody>
+          <a:bodyPr/>
+          <a:p/>
+        </p:txBody>
       </p:sp>
       <p:sp>
         <p:nvSpPr>
@@ -4614,6 +4638,10 @@
             </a:stretch>
           </a:blipFill>
         </p:spPr>
+        <p:txBody>
+          <a:bodyPr/>
+          <a:p/>
+        </p:txBody>
       </p:sp>
       <p:sp>
         <p:nvSpPr>
@@ -4666,6 +4694,10 @@
             </a:stretch>
           </a:blipFill>
         </p:spPr>
+        <p:txBody>
+          <a:bodyPr/>
+          <a:p/>
+        </p:txBody>
       </p:sp>
       <p:sp>
         <p:nvSpPr>
@@ -4718,6 +4750,10 @@
             </a:stretch>
           </a:blipFill>
         </p:spPr>
+        <p:txBody>
+          <a:bodyPr/>
+          <a:p/>
+        </p:txBody>
       </p:sp>
       <p:sp>
         <p:nvSpPr>
@@ -4770,6 +4806,10 @@
             </a:stretch>
           </a:blipFill>
         </p:spPr>
+        <p:txBody>
+          <a:bodyPr/>
+          <a:p/>
+        </p:txBody>
       </p:sp>
       <p:sp>
         <p:nvSpPr>
@@ -4822,6 +4862,10 @@
             </a:stretch>
           </a:blipFill>
         </p:spPr>
+        <p:txBody>
+          <a:bodyPr/>
+          <a:p/>
+        </p:txBody>
       </p:sp>
       <p:sp>
         <p:nvSpPr>
@@ -4874,6 +4918,10 @@
             </a:stretch>
           </a:blipFill>
         </p:spPr>
+        <p:txBody>
+          <a:bodyPr/>
+          <a:p/>
+        </p:txBody>
       </p:sp>
       <p:sp>
         <p:nvSpPr>
@@ -4926,6 +4974,10 @@
             </a:stretch>
           </a:blipFill>
         </p:spPr>
+        <p:txBody>
+          <a:bodyPr/>
+          <a:p/>
+        </p:txBody>
       </p:sp>
       <p:sp>
         <p:nvSpPr>
@@ -4947,56 +4999,7 @@
             <a:spAutoFit/>
           </a:bodyPr>
           <a:lstStyle/>
-          <a:p>
-            <a:pPr algn="ctr">
-              <a:lnSpc>
-                <a:spcPts val="14215"/>
-              </a:lnSpc>
-            </a:pPr>
-            <a:r>
-              <a:rPr lang="en-US" sz="16923">
-                <a:solidFill>
-                  <a:srgbClr val="6E4B37"/>
-                </a:solidFill>
-                <a:latin typeface="Libra Serif Modern"/>
-                <a:ea typeface="Libra Serif Modern"/>
-                <a:cs typeface="Libra Serif Modern"/>
-                <a:sym typeface="Libra Serif Modern"/>
-              </a:rPr>
-              <a:t>QNA</a:t>
-            </a:r>
-          </a:p>
-          <a:p>
-            <a:pPr algn="ctr">
-              <a:lnSpc>
-                <a:spcPts val="14215"/>
-              </a:lnSpc>
-            </a:pPr>
-            <a:r>
-              <a:rPr lang="en-US" sz="16923">
-                <a:solidFill>
-                  <a:srgbClr val="6E4B37"/>
-                </a:solidFill>
-                <a:latin typeface="Libra Serif Modern"/>
-                <a:ea typeface="Libra Serif Modern"/>
-                <a:cs typeface="Libra Serif Modern"/>
-                <a:sym typeface="Libra Serif Modern"/>
-              </a:rPr>
-              <a:t>Sessi</a:t>
-            </a:r>
-            <a:r>
-              <a:rPr lang="en-US" sz="16923">
-                <a:solidFill>
-                  <a:srgbClr val="6E4B37"/>
-                </a:solidFill>
-                <a:latin typeface="Libra Serif Modern"/>
-                <a:ea typeface="Libra Serif Modern"/>
-                <a:cs typeface="Libra Serif Modern"/>
-                <a:sym typeface="Libra Serif Modern"/>
-              </a:rPr>
-              <a:t>ON</a:t>
-            </a:r>
-          </a:p>
+          <a:p/>
         </p:txBody>
       </p:sp>
       <p:sp>
@@ -5050,6 +5053,10 @@
             </a:stretch>
           </a:blipFill>
         </p:spPr>
+        <p:txBody>
+          <a:bodyPr/>
+          <a:p/>
+        </p:txBody>
       </p:sp>
     </p:spTree>
   </p:cSld>
@@ -5134,6 +5141,10 @@
             </a:stretch>
           </a:blipFill>
         </p:spPr>
+        <p:txBody>
+          <a:bodyPr/>
+          <a:p/>
+        </p:txBody>
       </p:sp>
       <p:sp>
         <p:nvSpPr>
@@ -5186,6 +5197,10 @@
             </a:stretch>
           </a:blipFill>
         </p:spPr>
+        <p:txBody>
+          <a:bodyPr/>
+          <a:p/>
+        </p:txBody>
       </p:sp>
       <p:sp>
         <p:nvSpPr>
@@ -5238,6 +5253,10 @@
             </a:stretch>
           </a:blipFill>
         </p:spPr>
+        <p:txBody>
+          <a:bodyPr/>
+          <a:p/>
+        </p:txBody>
       </p:sp>
       <p:sp>
         <p:nvSpPr>
@@ -5290,6 +5309,10 @@
             </a:stretch>
           </a:blipFill>
         </p:spPr>
+        <p:txBody>
+          <a:bodyPr/>
+          <a:p/>
+        </p:txBody>
       </p:sp>
       <p:sp>
         <p:nvSpPr>
@@ -5342,6 +5365,10 @@
             </a:stretch>
           </a:blipFill>
         </p:spPr>
+        <p:txBody>
+          <a:bodyPr/>
+          <a:p/>
+        </p:txBody>
       </p:sp>
       <p:sp>
         <p:nvSpPr>
@@ -5394,6 +5421,10 @@
             </a:stretch>
           </a:blipFill>
         </p:spPr>
+        <p:txBody>
+          <a:bodyPr/>
+          <a:p/>
+        </p:txBody>
       </p:sp>
       <p:sp>
         <p:nvSpPr>
@@ -5446,6 +5477,10 @@
             </a:stretch>
           </a:blipFill>
         </p:spPr>
+        <p:txBody>
+          <a:bodyPr/>
+          <a:p/>
+        </p:txBody>
       </p:sp>
       <p:sp>
         <p:nvSpPr>
@@ -5498,6 +5533,10 @@
             </a:stretch>
           </a:blipFill>
         </p:spPr>
+        <p:txBody>
+          <a:bodyPr/>
+          <a:p/>
+        </p:txBody>
       </p:sp>
       <p:sp>
         <p:nvSpPr>
@@ -5550,6 +5589,10 @@
             </a:stretch>
           </a:blipFill>
         </p:spPr>
+        <p:txBody>
+          <a:bodyPr/>
+          <a:p/>
+        </p:txBody>
       </p:sp>
       <p:sp>
         <p:nvSpPr>
@@ -5571,44 +5614,7 @@
             <a:spAutoFit/>
           </a:bodyPr>
           <a:lstStyle/>
-          <a:p>
-            <a:pPr algn="ctr">
-              <a:lnSpc>
-                <a:spcPts val="14215"/>
-              </a:lnSpc>
-            </a:pPr>
-            <a:r>
-              <a:rPr lang="en-US" sz="16923">
-                <a:solidFill>
-                  <a:srgbClr val="6E4B37"/>
-                </a:solidFill>
-                <a:latin typeface="Libra Serif Modern"/>
-                <a:ea typeface="Libra Serif Modern"/>
-                <a:cs typeface="Libra Serif Modern"/>
-                <a:sym typeface="Libra Serif Modern"/>
-              </a:rPr>
-              <a:t>THANK</a:t>
-            </a:r>
-          </a:p>
-          <a:p>
-            <a:pPr algn="ctr">
-              <a:lnSpc>
-                <a:spcPts val="14215"/>
-              </a:lnSpc>
-            </a:pPr>
-            <a:r>
-              <a:rPr lang="en-US" sz="16923">
-                <a:solidFill>
-                  <a:srgbClr val="6E4B37"/>
-                </a:solidFill>
-                <a:latin typeface="Libra Serif Modern"/>
-                <a:ea typeface="Libra Serif Modern"/>
-                <a:cs typeface="Libra Serif Modern"/>
-                <a:sym typeface="Libra Serif Modern"/>
-              </a:rPr>
-              <a:t>YOU</a:t>
-            </a:r>
-          </a:p>
+          <a:p/>
         </p:txBody>
       </p:sp>
       <p:sp>
@@ -5662,6 +5668,10 @@
             </a:stretch>
           </a:blipFill>
         </p:spPr>
+        <p:txBody>
+          <a:bodyPr/>
+          <a:p/>
+        </p:txBody>
       </p:sp>
     </p:spTree>
   </p:cSld>
@@ -5746,6 +5756,10 @@
             </a:stretch>
           </a:blipFill>
         </p:spPr>
+        <p:txBody>
+          <a:bodyPr/>
+          <a:p/>
+        </p:txBody>
       </p:sp>
       <p:sp>
         <p:nvSpPr>
@@ -5798,6 +5812,10 @@
             </a:stretch>
           </a:blipFill>
         </p:spPr>
+        <p:txBody>
+          <a:bodyPr/>
+          <a:p/>
+        </p:txBody>
       </p:sp>
       <p:sp>
         <p:nvSpPr>
@@ -5850,6 +5868,10 @@
             </a:stretch>
           </a:blipFill>
         </p:spPr>
+        <p:txBody>
+          <a:bodyPr/>
+          <a:p/>
+        </p:txBody>
       </p:sp>
       <p:sp>
         <p:nvSpPr>
@@ -5902,6 +5924,10 @@
             </a:stretch>
           </a:blipFill>
         </p:spPr>
+        <p:txBody>
+          <a:bodyPr/>
+          <a:p/>
+        </p:txBody>
       </p:sp>
       <p:sp>
         <p:nvSpPr>
@@ -5954,6 +5980,10 @@
             </a:stretch>
           </a:blipFill>
         </p:spPr>
+        <p:txBody>
+          <a:bodyPr/>
+          <a:p/>
+        </p:txBody>
       </p:sp>
       <p:sp>
         <p:nvSpPr>
@@ -6006,6 +6036,10 @@
             </a:stretch>
           </a:blipFill>
         </p:spPr>
+        <p:txBody>
+          <a:bodyPr/>
+          <a:p/>
+        </p:txBody>
       </p:sp>
       <p:sp>
         <p:nvSpPr>
@@ -6058,6 +6092,10 @@
             </a:stretch>
           </a:blipFill>
         </p:spPr>
+        <p:txBody>
+          <a:bodyPr/>
+          <a:p/>
+        </p:txBody>
       </p:sp>
       <p:sp>
         <p:nvSpPr>
@@ -6110,6 +6148,10 @@
             </a:stretch>
           </a:blipFill>
         </p:spPr>
+        <p:txBody>
+          <a:bodyPr/>
+          <a:p/>
+        </p:txBody>
       </p:sp>
       <p:sp>
         <p:nvSpPr>
@@ -6162,6 +6204,10 @@
             </a:stretch>
           </a:blipFill>
         </p:spPr>
+        <p:txBody>
+          <a:bodyPr/>
+          <a:p/>
+        </p:txBody>
       </p:sp>
       <p:sp>
         <p:nvSpPr>
@@ -6214,6 +6260,10 @@
             </a:stretch>
           </a:blipFill>
         </p:spPr>
+        <p:txBody>
+          <a:bodyPr/>
+          <a:p/>
+        </p:txBody>
       </p:sp>
       <p:sp>
         <p:nvSpPr>
@@ -6235,25 +6285,7 @@
             <a:spAutoFit/>
           </a:bodyPr>
           <a:lstStyle/>
-          <a:p>
-            <a:pPr algn="ctr">
-              <a:lnSpc>
-                <a:spcPts val="8418"/>
-              </a:lnSpc>
-            </a:pPr>
-            <a:r>
-              <a:rPr lang="en-US" sz="10021">
-                <a:solidFill>
-                  <a:srgbClr val="6E4B37"/>
-                </a:solidFill>
-                <a:latin typeface="Libra Serif Modern"/>
-                <a:ea typeface="Libra Serif Modern"/>
-                <a:cs typeface="Libra Serif Modern"/>
-                <a:sym typeface="Libra Serif Modern"/>
-              </a:rPr>
-              <a:t>OUR TEAM</a:t>
-            </a:r>
-          </a:p>
+          <a:p/>
         </p:txBody>
       </p:sp>
       <p:sp>
@@ -6276,25 +6308,7 @@
             <a:spAutoFit/>
           </a:bodyPr>
           <a:lstStyle/>
-          <a:p>
-            <a:pPr algn="ctr">
-              <a:lnSpc>
-                <a:spcPts val="3399"/>
-              </a:lnSpc>
-            </a:pPr>
-            <a:r>
-              <a:rPr lang="en-US" sz="3399">
-                <a:solidFill>
-                  <a:srgbClr val="6E4B37"/>
-                </a:solidFill>
-                <a:latin typeface="Arimo"/>
-                <a:ea typeface="Arimo"/>
-                <a:cs typeface="Arimo"/>
-                <a:sym typeface="Arimo"/>
-              </a:rPr>
-              <a:t>Isabel Mercado</a:t>
-            </a:r>
-          </a:p>
+          <a:p/>
         </p:txBody>
       </p:sp>
       <p:sp>
@@ -6317,25 +6331,7 @@
             <a:spAutoFit/>
           </a:bodyPr>
           <a:lstStyle/>
-          <a:p>
-            <a:pPr algn="ctr">
-              <a:lnSpc>
-                <a:spcPts val="3399"/>
-              </a:lnSpc>
-            </a:pPr>
-            <a:r>
-              <a:rPr lang="en-US" sz="3399">
-                <a:solidFill>
-                  <a:srgbClr val="6E4B37"/>
-                </a:solidFill>
-                <a:latin typeface="Arimo"/>
-                <a:ea typeface="Arimo"/>
-                <a:cs typeface="Arimo"/>
-                <a:sym typeface="Arimo"/>
-              </a:rPr>
-              <a:t>Jacqueline Thompson</a:t>
-            </a:r>
-          </a:p>
+          <a:p/>
         </p:txBody>
       </p:sp>
       <p:sp>
@@ -6358,25 +6354,7 @@
             <a:spAutoFit/>
           </a:bodyPr>
           <a:lstStyle/>
-          <a:p>
-            <a:pPr algn="ctr">
-              <a:lnSpc>
-                <a:spcPts val="3399"/>
-              </a:lnSpc>
-            </a:pPr>
-            <a:r>
-              <a:rPr lang="en-US" sz="3399">
-                <a:solidFill>
-                  <a:srgbClr val="6E4B37"/>
-                </a:solidFill>
-                <a:latin typeface="Arimo"/>
-                <a:ea typeface="Arimo"/>
-                <a:cs typeface="Arimo"/>
-                <a:sym typeface="Arimo"/>
-              </a:rPr>
-              <a:t>Adeline Palmerston</a:t>
-            </a:r>
-          </a:p>
+          <a:p/>
         </p:txBody>
       </p:sp>
     </p:spTree>
@@ -6462,6 +6440,10 @@
             </a:stretch>
           </a:blipFill>
         </p:spPr>
+        <p:txBody>
+          <a:bodyPr/>
+          <a:p/>
+        </p:txBody>
       </p:sp>
       <p:sp>
         <p:nvSpPr>
@@ -6514,6 +6496,10 @@
             </a:stretch>
           </a:blipFill>
         </p:spPr>
+        <p:txBody>
+          <a:bodyPr/>
+          <a:p/>
+        </p:txBody>
       </p:sp>
       <p:sp>
         <p:nvSpPr>
@@ -6566,6 +6552,10 @@
             </a:stretch>
           </a:blipFill>
         </p:spPr>
+        <p:txBody>
+          <a:bodyPr/>
+          <a:p/>
+        </p:txBody>
       </p:sp>
       <p:sp>
         <p:nvSpPr>
@@ -6618,6 +6608,10 @@
             </a:stretch>
           </a:blipFill>
         </p:spPr>
+        <p:txBody>
+          <a:bodyPr/>
+          <a:p/>
+        </p:txBody>
       </p:sp>
       <p:sp>
         <p:nvSpPr>
@@ -6670,6 +6664,10 @@
             </a:stretch>
           </a:blipFill>
         </p:spPr>
+        <p:txBody>
+          <a:bodyPr/>
+          <a:p/>
+        </p:txBody>
       </p:sp>
       <p:sp>
         <p:nvSpPr>
@@ -6722,6 +6720,10 @@
             </a:stretch>
           </a:blipFill>
         </p:spPr>
+        <p:txBody>
+          <a:bodyPr/>
+          <a:p/>
+        </p:txBody>
       </p:sp>
       <p:sp>
         <p:nvSpPr>
@@ -6774,6 +6776,10 @@
             </a:stretch>
           </a:blipFill>
         </p:spPr>
+        <p:txBody>
+          <a:bodyPr/>
+          <a:p/>
+        </p:txBody>
       </p:sp>
       <p:sp>
         <p:nvSpPr>
@@ -6826,6 +6832,10 @@
             </a:stretch>
           </a:blipFill>
         </p:spPr>
+        <p:txBody>
+          <a:bodyPr/>
+          <a:p/>
+        </p:txBody>
       </p:sp>
       <p:sp>
         <p:nvSpPr>
@@ -6878,6 +6888,10 @@
             </a:stretch>
           </a:blipFill>
         </p:spPr>
+        <p:txBody>
+          <a:bodyPr/>
+          <a:p/>
+        </p:txBody>
       </p:sp>
       <p:sp>
         <p:nvSpPr>
@@ -6930,6 +6944,10 @@
             </a:stretch>
           </a:blipFill>
         </p:spPr>
+        <p:txBody>
+          <a:bodyPr/>
+          <a:p/>
+        </p:txBody>
       </p:sp>
       <p:sp>
         <p:nvSpPr>
@@ -6951,25 +6969,7 @@
             <a:spAutoFit/>
           </a:bodyPr>
           <a:lstStyle/>
-          <a:p>
-            <a:pPr algn="ctr">
-              <a:lnSpc>
-                <a:spcPts val="8418"/>
-              </a:lnSpc>
-            </a:pPr>
-            <a:r>
-              <a:rPr lang="en-US" sz="10021">
-                <a:solidFill>
-                  <a:srgbClr val="6E4B37"/>
-                </a:solidFill>
-                <a:latin typeface="Libra Serif Modern"/>
-                <a:ea typeface="Libra Serif Modern"/>
-                <a:cs typeface="Libra Serif Modern"/>
-                <a:sym typeface="Libra Serif Modern"/>
-              </a:rPr>
-              <a:t>ABSTRACT</a:t>
-            </a:r>
-          </a:p>
+          <a:p/>
         </p:txBody>
       </p:sp>
       <p:sp>
@@ -6992,25 +6992,7 @@
             <a:spAutoFit/>
           </a:bodyPr>
           <a:lstStyle/>
-          <a:p>
-            <a:pPr algn="ctr">
-              <a:lnSpc>
-                <a:spcPts val="3875"/>
-              </a:lnSpc>
-            </a:pPr>
-            <a:r>
-              <a:rPr lang="en-US" sz="3399">
-                <a:solidFill>
-                  <a:srgbClr val="6E4B37"/>
-                </a:solidFill>
-                <a:latin typeface="Arimo"/>
-                <a:ea typeface="Arimo"/>
-                <a:cs typeface="Arimo"/>
-                <a:sym typeface="Arimo"/>
-              </a:rPr>
-              <a:t>Lorem ipsum dolor sit amet, consectetur adipiscing elit. Duis viverra dui mauris, sed hendrerit mi cursus faucibus. Proin accumsan arcu eu tempus molestie. Nulla quis libero scelerisque, hendrerit ex eu, varius metus. Vestibulum scelerisque tellus velit, sed tempus massa venenatis eu. Duis sit amet elementum diam. Cras blandit feugiat arcu, id tempor dui finibus ac. Pellentesque faucibus feugiat nibh vel feugiat.</a:t>
-            </a:r>
-          </a:p>
+          <a:p/>
         </p:txBody>
       </p:sp>
     </p:spTree>
@@ -7096,6 +7078,10 @@
             </a:stretch>
           </a:blipFill>
         </p:spPr>
+        <p:txBody>
+          <a:bodyPr/>
+          <a:p/>
+        </p:txBody>
       </p:sp>
       <p:sp>
         <p:nvSpPr>
@@ -7148,6 +7134,10 @@
             </a:stretch>
           </a:blipFill>
         </p:spPr>
+        <p:txBody>
+          <a:bodyPr/>
+          <a:p/>
+        </p:txBody>
       </p:sp>
       <p:sp>
         <p:nvSpPr>
@@ -7200,6 +7190,10 @@
             </a:stretch>
           </a:blipFill>
         </p:spPr>
+        <p:txBody>
+          <a:bodyPr/>
+          <a:p/>
+        </p:txBody>
       </p:sp>
       <p:sp>
         <p:nvSpPr>
@@ -7252,6 +7246,10 @@
             </a:stretch>
           </a:blipFill>
         </p:spPr>
+        <p:txBody>
+          <a:bodyPr/>
+          <a:p/>
+        </p:txBody>
       </p:sp>
       <p:sp>
         <p:nvSpPr>
@@ -7304,6 +7302,10 @@
             </a:stretch>
           </a:blipFill>
         </p:spPr>
+        <p:txBody>
+          <a:bodyPr/>
+          <a:p/>
+        </p:txBody>
       </p:sp>
       <p:sp>
         <p:nvSpPr>
@@ -7356,6 +7358,10 @@
             </a:stretch>
           </a:blipFill>
         </p:spPr>
+        <p:txBody>
+          <a:bodyPr/>
+          <a:p/>
+        </p:txBody>
       </p:sp>
       <p:sp>
         <p:nvSpPr>
@@ -7408,6 +7414,10 @@
             </a:stretch>
           </a:blipFill>
         </p:spPr>
+        <p:txBody>
+          <a:bodyPr/>
+          <a:p/>
+        </p:txBody>
       </p:sp>
       <p:sp>
         <p:nvSpPr>
@@ -7460,6 +7470,10 @@
             </a:stretch>
           </a:blipFill>
         </p:spPr>
+        <p:txBody>
+          <a:bodyPr/>
+          <a:p/>
+        </p:txBody>
       </p:sp>
       <p:sp>
         <p:nvSpPr>
@@ -7512,6 +7526,10 @@
             </a:stretch>
           </a:blipFill>
         </p:spPr>
+        <p:txBody>
+          <a:bodyPr/>
+          <a:p/>
+        </p:txBody>
       </p:sp>
       <p:sp>
         <p:nvSpPr>
@@ -7564,6 +7582,10 @@
             </a:stretch>
           </a:blipFill>
         </p:spPr>
+        <p:txBody>
+          <a:bodyPr/>
+          <a:p/>
+        </p:txBody>
       </p:sp>
       <p:sp>
         <p:nvSpPr>
@@ -7585,25 +7607,7 @@
             <a:spAutoFit/>
           </a:bodyPr>
           <a:lstStyle/>
-          <a:p>
-            <a:pPr algn="ctr">
-              <a:lnSpc>
-                <a:spcPts val="8418"/>
-              </a:lnSpc>
-            </a:pPr>
-            <a:r>
-              <a:rPr lang="en-US" sz="10021">
-                <a:solidFill>
-                  <a:srgbClr val="6E4B37"/>
-                </a:solidFill>
-                <a:latin typeface="Libra Serif Modern"/>
-                <a:ea typeface="Libra Serif Modern"/>
-                <a:cs typeface="Libra Serif Modern"/>
-                <a:sym typeface="Libra Serif Modern"/>
-              </a:rPr>
-              <a:t>INTRODUCTION</a:t>
-            </a:r>
-          </a:p>
+          <a:p/>
         </p:txBody>
       </p:sp>
       <p:sp>
@@ -7626,25 +7630,7 @@
             <a:spAutoFit/>
           </a:bodyPr>
           <a:lstStyle/>
-          <a:p>
-            <a:pPr algn="ctr">
-              <a:lnSpc>
-                <a:spcPts val="3875"/>
-              </a:lnSpc>
-            </a:pPr>
-            <a:r>
-              <a:rPr lang="en-US" sz="3399">
-                <a:solidFill>
-                  <a:srgbClr val="6E4B37"/>
-                </a:solidFill>
-                <a:latin typeface="Arimo"/>
-                <a:ea typeface="Arimo"/>
-                <a:cs typeface="Arimo"/>
-                <a:sym typeface="Arimo"/>
-              </a:rPr>
-              <a:t>Lorem ipsum dolor sit amet, consectetur adipiscing elit. Duis viverra dui mauris, sed hendrerit mi cursus faucibus. Proin accumsan arcu eu tempus molestie. Nulla quis libero scelerisque, hendrerit ex eu, varius metus. Vestibulum scelerisque tellus velit, sed tempus massa venenatis eu. Duis sit amet elementum diam. Cras blandit feugiat arcu, id tempor dui finibus ac. Pellentesque faucibus feugiat nibh vel feugiat.</a:t>
-            </a:r>
-          </a:p>
+          <a:p/>
         </p:txBody>
       </p:sp>
     </p:spTree>
@@ -7730,6 +7716,10 @@
             </a:stretch>
           </a:blipFill>
         </p:spPr>
+        <p:txBody>
+          <a:bodyPr/>
+          <a:p/>
+        </p:txBody>
       </p:sp>
       <p:sp>
         <p:nvSpPr>
@@ -7782,6 +7772,10 @@
             </a:stretch>
           </a:blipFill>
         </p:spPr>
+        <p:txBody>
+          <a:bodyPr/>
+          <a:p/>
+        </p:txBody>
       </p:sp>
       <p:sp>
         <p:nvSpPr>
@@ -7834,6 +7828,10 @@
             </a:stretch>
           </a:blipFill>
         </p:spPr>
+        <p:txBody>
+          <a:bodyPr/>
+          <a:p/>
+        </p:txBody>
       </p:sp>
       <p:sp>
         <p:nvSpPr>
@@ -7886,6 +7884,10 @@
             </a:stretch>
           </a:blipFill>
         </p:spPr>
+        <p:txBody>
+          <a:bodyPr/>
+          <a:p/>
+        </p:txBody>
       </p:sp>
       <p:sp>
         <p:nvSpPr>
@@ -7938,6 +7940,10 @@
             </a:stretch>
           </a:blipFill>
         </p:spPr>
+        <p:txBody>
+          <a:bodyPr/>
+          <a:p/>
+        </p:txBody>
       </p:sp>
       <p:sp>
         <p:nvSpPr>
@@ -7990,6 +7996,10 @@
             </a:stretch>
           </a:blipFill>
         </p:spPr>
+        <p:txBody>
+          <a:bodyPr/>
+          <a:p/>
+        </p:txBody>
       </p:sp>
       <p:sp>
         <p:nvSpPr>
@@ -8042,6 +8052,10 @@
             </a:stretch>
           </a:blipFill>
         </p:spPr>
+        <p:txBody>
+          <a:bodyPr/>
+          <a:p/>
+        </p:txBody>
       </p:sp>
       <p:sp>
         <p:nvSpPr>
@@ -8094,6 +8108,10 @@
             </a:stretch>
           </a:blipFill>
         </p:spPr>
+        <p:txBody>
+          <a:bodyPr/>
+          <a:p/>
+        </p:txBody>
       </p:sp>
       <p:sp>
         <p:nvSpPr>
@@ -8146,6 +8164,10 @@
             </a:stretch>
           </a:blipFill>
         </p:spPr>
+        <p:txBody>
+          <a:bodyPr/>
+          <a:p/>
+        </p:txBody>
       </p:sp>
       <p:sp>
         <p:nvSpPr>
@@ -8198,6 +8220,10 @@
             </a:stretch>
           </a:blipFill>
         </p:spPr>
+        <p:txBody>
+          <a:bodyPr/>
+          <a:p/>
+        </p:txBody>
       </p:sp>
       <p:sp>
         <p:nvSpPr>
@@ -8219,25 +8245,7 @@
             <a:spAutoFit/>
           </a:bodyPr>
           <a:lstStyle/>
-          <a:p>
-            <a:pPr algn="ctr">
-              <a:lnSpc>
-                <a:spcPts val="8418"/>
-              </a:lnSpc>
-            </a:pPr>
-            <a:r>
-              <a:rPr lang="en-US" sz="10021">
-                <a:solidFill>
-                  <a:srgbClr val="6E4B37"/>
-                </a:solidFill>
-                <a:latin typeface="Libra Serif Modern"/>
-                <a:ea typeface="Libra Serif Modern"/>
-                <a:cs typeface="Libra Serif Modern"/>
-                <a:sym typeface="Libra Serif Modern"/>
-              </a:rPr>
-              <a:t>OBJECTIVES</a:t>
-            </a:r>
-          </a:p>
+          <a:p/>
         </p:txBody>
       </p:sp>
       <p:sp>
@@ -8260,25 +8268,7 @@
             <a:spAutoFit/>
           </a:bodyPr>
           <a:lstStyle/>
-          <a:p>
-            <a:pPr algn="l">
-              <a:lnSpc>
-                <a:spcPts val="3875"/>
-              </a:lnSpc>
-            </a:pPr>
-            <a:r>
-              <a:rPr lang="en-US" sz="3399">
-                <a:solidFill>
-                  <a:srgbClr val="6E4B37"/>
-                </a:solidFill>
-                <a:latin typeface="Arimo"/>
-                <a:ea typeface="Arimo"/>
-                <a:cs typeface="Arimo"/>
-                <a:sym typeface="Arimo"/>
-              </a:rPr>
-              <a:t>Lorem ipsum dolor sit amet, consectetur adipiscing elit. Duis viverra dui mauris, sed hendrerit mi cursus faucibus. Proin accumsan arcu eu tempus molestie. Nulla quis libero scelerisque, hendrerit ex eu, varius metus.</a:t>
-            </a:r>
-          </a:p>
+          <a:p/>
         </p:txBody>
       </p:sp>
       <p:sp>
@@ -8301,25 +8291,7 @@
             <a:spAutoFit/>
           </a:bodyPr>
           <a:lstStyle/>
-          <a:p>
-            <a:pPr algn="l">
-              <a:lnSpc>
-                <a:spcPts val="3875"/>
-              </a:lnSpc>
-            </a:pPr>
-            <a:r>
-              <a:rPr lang="en-US" sz="3399">
-                <a:solidFill>
-                  <a:srgbClr val="6E4B37"/>
-                </a:solidFill>
-                <a:latin typeface="Arimo"/>
-                <a:ea typeface="Arimo"/>
-                <a:cs typeface="Arimo"/>
-                <a:sym typeface="Arimo"/>
-              </a:rPr>
-              <a:t>Lorem ipsum dolor sit amet, consectetur adipiscing elit. Duis viverra dui mauris, sed hendrerit mi cursus faucibus. Proin accumsan arcu eu tempus molestie. Nulla quis libero scelerisque, hendrerit ex eu, varius metus.</a:t>
-            </a:r>
-          </a:p>
+          <a:p/>
         </p:txBody>
       </p:sp>
     </p:spTree>
@@ -8405,6 +8377,10 @@
             </a:stretch>
           </a:blipFill>
         </p:spPr>
+        <p:txBody>
+          <a:bodyPr/>
+          <a:p/>
+        </p:txBody>
       </p:sp>
       <p:sp>
         <p:nvSpPr>
@@ -8457,6 +8433,10 @@
             </a:stretch>
           </a:blipFill>
         </p:spPr>
+        <p:txBody>
+          <a:bodyPr/>
+          <a:p/>
+        </p:txBody>
       </p:sp>
       <p:sp>
         <p:nvSpPr>
@@ -8509,6 +8489,10 @@
             </a:stretch>
           </a:blipFill>
         </p:spPr>
+        <p:txBody>
+          <a:bodyPr/>
+          <a:p/>
+        </p:txBody>
       </p:sp>
       <p:sp>
         <p:nvSpPr>
@@ -8561,6 +8545,10 @@
             </a:stretch>
           </a:blipFill>
         </p:spPr>
+        <p:txBody>
+          <a:bodyPr/>
+          <a:p/>
+        </p:txBody>
       </p:sp>
       <p:sp>
         <p:nvSpPr>
@@ -8613,6 +8601,10 @@
             </a:stretch>
           </a:blipFill>
         </p:spPr>
+        <p:txBody>
+          <a:bodyPr/>
+          <a:p/>
+        </p:txBody>
       </p:sp>
       <p:sp>
         <p:nvSpPr>
@@ -8665,6 +8657,10 @@
             </a:stretch>
           </a:blipFill>
         </p:spPr>
+        <p:txBody>
+          <a:bodyPr/>
+          <a:p/>
+        </p:txBody>
       </p:sp>
       <p:sp>
         <p:nvSpPr>
@@ -8717,6 +8713,10 @@
             </a:stretch>
           </a:blipFill>
         </p:spPr>
+        <p:txBody>
+          <a:bodyPr/>
+          <a:p/>
+        </p:txBody>
       </p:sp>
       <p:sp>
         <p:nvSpPr>
@@ -8769,6 +8769,10 @@
             </a:stretch>
           </a:blipFill>
         </p:spPr>
+        <p:txBody>
+          <a:bodyPr/>
+          <a:p/>
+        </p:txBody>
       </p:sp>
       <p:sp>
         <p:nvSpPr>
@@ -8821,6 +8825,10 @@
             </a:stretch>
           </a:blipFill>
         </p:spPr>
+        <p:txBody>
+          <a:bodyPr/>
+          <a:p/>
+        </p:txBody>
       </p:sp>
       <p:sp>
         <p:nvSpPr>
@@ -8873,6 +8881,10 @@
             </a:stretch>
           </a:blipFill>
         </p:spPr>
+        <p:txBody>
+          <a:bodyPr/>
+          <a:p/>
+        </p:txBody>
       </p:sp>
       <p:sp>
         <p:nvSpPr>
@@ -8894,25 +8906,7 @@
             <a:spAutoFit/>
           </a:bodyPr>
           <a:lstStyle/>
-          <a:p>
-            <a:pPr algn="ctr">
-              <a:lnSpc>
-                <a:spcPts val="8418"/>
-              </a:lnSpc>
-            </a:pPr>
-            <a:r>
-              <a:rPr lang="en-US" sz="10021">
-                <a:solidFill>
-                  <a:srgbClr val="6E4B37"/>
-                </a:solidFill>
-                <a:latin typeface="Libra Serif Modern"/>
-                <a:ea typeface="Libra Serif Modern"/>
-                <a:cs typeface="Libra Serif Modern"/>
-                <a:sym typeface="Libra Serif Modern"/>
-              </a:rPr>
-              <a:t>GOALS</a:t>
-            </a:r>
-          </a:p>
+          <a:p/>
         </p:txBody>
       </p:sp>
       <p:sp>
@@ -8935,25 +8929,7 @@
             <a:spAutoFit/>
           </a:bodyPr>
           <a:lstStyle/>
-          <a:p>
-            <a:pPr algn="l">
-              <a:lnSpc>
-                <a:spcPts val="3875"/>
-              </a:lnSpc>
-            </a:pPr>
-            <a:r>
-              <a:rPr lang="en-US" sz="3399">
-                <a:solidFill>
-                  <a:srgbClr val="6E4B37"/>
-                </a:solidFill>
-                <a:latin typeface="Arimo"/>
-                <a:ea typeface="Arimo"/>
-                <a:cs typeface="Arimo"/>
-                <a:sym typeface="Arimo"/>
-              </a:rPr>
-              <a:t>Lorem ipsum dolor sit amet, consectetur adipiscing elit. </a:t>
-            </a:r>
-          </a:p>
+          <a:p/>
         </p:txBody>
       </p:sp>
       <p:sp>
@@ -8976,25 +8952,7 @@
             <a:spAutoFit/>
           </a:bodyPr>
           <a:lstStyle/>
-          <a:p>
-            <a:pPr algn="ctr">
-              <a:lnSpc>
-                <a:spcPts val="5691"/>
-              </a:lnSpc>
-            </a:pPr>
-            <a:r>
-              <a:rPr lang="en-US" sz="6776">
-                <a:solidFill>
-                  <a:srgbClr val="6E4B37"/>
-                </a:solidFill>
-                <a:latin typeface="Libra Serif Modern"/>
-                <a:ea typeface="Libra Serif Modern"/>
-                <a:cs typeface="Libra Serif Modern"/>
-                <a:sym typeface="Libra Serif Modern"/>
-              </a:rPr>
-              <a:t>1.</a:t>
-            </a:r>
-          </a:p>
+          <a:p/>
         </p:txBody>
       </p:sp>
       <p:sp>
@@ -9017,25 +8975,7 @@
             <a:spAutoFit/>
           </a:bodyPr>
           <a:lstStyle/>
-          <a:p>
-            <a:pPr algn="l">
-              <a:lnSpc>
-                <a:spcPts val="3875"/>
-              </a:lnSpc>
-            </a:pPr>
-            <a:r>
-              <a:rPr lang="en-US" sz="3399">
-                <a:solidFill>
-                  <a:srgbClr val="6E4B37"/>
-                </a:solidFill>
-                <a:latin typeface="Arimo"/>
-                <a:ea typeface="Arimo"/>
-                <a:cs typeface="Arimo"/>
-                <a:sym typeface="Arimo"/>
-              </a:rPr>
-              <a:t>Lorem ipsum dolor sit amet, consectetur adipiscing elit. </a:t>
-            </a:r>
-          </a:p>
+          <a:p/>
         </p:txBody>
       </p:sp>
       <p:sp>
@@ -9058,25 +8998,7 @@
             <a:spAutoFit/>
           </a:bodyPr>
           <a:lstStyle/>
-          <a:p>
-            <a:pPr algn="ctr">
-              <a:lnSpc>
-                <a:spcPts val="5691"/>
-              </a:lnSpc>
-            </a:pPr>
-            <a:r>
-              <a:rPr lang="en-US" sz="6776">
-                <a:solidFill>
-                  <a:srgbClr val="6E4B37"/>
-                </a:solidFill>
-                <a:latin typeface="Libra Serif Modern"/>
-                <a:ea typeface="Libra Serif Modern"/>
-                <a:cs typeface="Libra Serif Modern"/>
-                <a:sym typeface="Libra Serif Modern"/>
-              </a:rPr>
-              <a:t>2.</a:t>
-            </a:r>
-          </a:p>
+          <a:p/>
         </p:txBody>
       </p:sp>
       <p:sp>
@@ -9099,25 +9021,7 @@
             <a:spAutoFit/>
           </a:bodyPr>
           <a:lstStyle/>
-          <a:p>
-            <a:pPr algn="l">
-              <a:lnSpc>
-                <a:spcPts val="3875"/>
-              </a:lnSpc>
-            </a:pPr>
-            <a:r>
-              <a:rPr lang="en-US" sz="3399">
-                <a:solidFill>
-                  <a:srgbClr val="6E4B37"/>
-                </a:solidFill>
-                <a:latin typeface="Arimo"/>
-                <a:ea typeface="Arimo"/>
-                <a:cs typeface="Arimo"/>
-                <a:sym typeface="Arimo"/>
-              </a:rPr>
-              <a:t>Lorem ipsum dolor sit amet, consectetur adipiscing elit. </a:t>
-            </a:r>
-          </a:p>
+          <a:p/>
         </p:txBody>
       </p:sp>
       <p:sp>
@@ -9140,25 +9044,7 @@
             <a:spAutoFit/>
           </a:bodyPr>
           <a:lstStyle/>
-          <a:p>
-            <a:pPr algn="ctr">
-              <a:lnSpc>
-                <a:spcPts val="5691"/>
-              </a:lnSpc>
-            </a:pPr>
-            <a:r>
-              <a:rPr lang="en-US" sz="6776">
-                <a:solidFill>
-                  <a:srgbClr val="6E4B37"/>
-                </a:solidFill>
-                <a:latin typeface="Libra Serif Modern"/>
-                <a:ea typeface="Libra Serif Modern"/>
-                <a:cs typeface="Libra Serif Modern"/>
-                <a:sym typeface="Libra Serif Modern"/>
-              </a:rPr>
-              <a:t>3.</a:t>
-            </a:r>
-          </a:p>
+          <a:p/>
         </p:txBody>
       </p:sp>
       <p:sp>
@@ -9181,25 +9067,7 @@
             <a:spAutoFit/>
           </a:bodyPr>
           <a:lstStyle/>
-          <a:p>
-            <a:pPr algn="l">
-              <a:lnSpc>
-                <a:spcPts val="3875"/>
-              </a:lnSpc>
-            </a:pPr>
-            <a:r>
-              <a:rPr lang="en-US" sz="3399">
-                <a:solidFill>
-                  <a:srgbClr val="6E4B37"/>
-                </a:solidFill>
-                <a:latin typeface="Arimo"/>
-                <a:ea typeface="Arimo"/>
-                <a:cs typeface="Arimo"/>
-                <a:sym typeface="Arimo"/>
-              </a:rPr>
-              <a:t>Lorem ipsum dolor sit amet, consectetur adipiscing elit. </a:t>
-            </a:r>
-          </a:p>
+          <a:p/>
         </p:txBody>
       </p:sp>
       <p:sp>
@@ -9222,25 +9090,7 @@
             <a:spAutoFit/>
           </a:bodyPr>
           <a:lstStyle/>
-          <a:p>
-            <a:pPr algn="ctr">
-              <a:lnSpc>
-                <a:spcPts val="5691"/>
-              </a:lnSpc>
-            </a:pPr>
-            <a:r>
-              <a:rPr lang="en-US" sz="6776">
-                <a:solidFill>
-                  <a:srgbClr val="6E4B37"/>
-                </a:solidFill>
-                <a:latin typeface="Libra Serif Modern"/>
-                <a:ea typeface="Libra Serif Modern"/>
-                <a:cs typeface="Libra Serif Modern"/>
-                <a:sym typeface="Libra Serif Modern"/>
-              </a:rPr>
-              <a:t>4.</a:t>
-            </a:r>
-          </a:p>
+          <a:p/>
         </p:txBody>
       </p:sp>
     </p:spTree>
@@ -9326,6 +9176,10 @@
             </a:stretch>
           </a:blipFill>
         </p:spPr>
+        <p:txBody>
+          <a:bodyPr/>
+          <a:p/>
+        </p:txBody>
       </p:sp>
       <p:sp>
         <p:nvSpPr>
@@ -9378,6 +9232,10 @@
             </a:stretch>
           </a:blipFill>
         </p:spPr>
+        <p:txBody>
+          <a:bodyPr/>
+          <a:p/>
+        </p:txBody>
       </p:sp>
       <p:sp>
         <p:nvSpPr>
@@ -9430,6 +9288,10 @@
             </a:stretch>
           </a:blipFill>
         </p:spPr>
+        <p:txBody>
+          <a:bodyPr/>
+          <a:p/>
+        </p:txBody>
       </p:sp>
       <p:sp>
         <p:nvSpPr>
@@ -9482,6 +9344,10 @@
             </a:stretch>
           </a:blipFill>
         </p:spPr>
+        <p:txBody>
+          <a:bodyPr/>
+          <a:p/>
+        </p:txBody>
       </p:sp>
       <p:sp>
         <p:nvSpPr>
@@ -9534,6 +9400,10 @@
             </a:stretch>
           </a:blipFill>
         </p:spPr>
+        <p:txBody>
+          <a:bodyPr/>
+          <a:p/>
+        </p:txBody>
       </p:sp>
       <p:sp>
         <p:nvSpPr>
@@ -9586,6 +9456,10 @@
             </a:stretch>
           </a:blipFill>
         </p:spPr>
+        <p:txBody>
+          <a:bodyPr/>
+          <a:p/>
+        </p:txBody>
       </p:sp>
       <p:sp>
         <p:nvSpPr>
@@ -9638,6 +9512,10 @@
             </a:stretch>
           </a:blipFill>
         </p:spPr>
+        <p:txBody>
+          <a:bodyPr/>
+          <a:p/>
+        </p:txBody>
       </p:sp>
       <p:sp>
         <p:nvSpPr>
@@ -9690,6 +9568,10 @@
             </a:stretch>
           </a:blipFill>
         </p:spPr>
+        <p:txBody>
+          <a:bodyPr/>
+          <a:p/>
+        </p:txBody>
       </p:sp>
       <p:sp>
         <p:nvSpPr>
@@ -9742,6 +9624,10 @@
             </a:stretch>
           </a:blipFill>
         </p:spPr>
+        <p:txBody>
+          <a:bodyPr/>
+          <a:p/>
+        </p:txBody>
       </p:sp>
       <p:sp>
         <p:nvSpPr>
@@ -9794,6 +9680,10 @@
             </a:stretch>
           </a:blipFill>
         </p:spPr>
+        <p:txBody>
+          <a:bodyPr/>
+          <a:p/>
+        </p:txBody>
       </p:sp>
       <p:sp>
         <p:nvSpPr>
@@ -9815,25 +9705,7 @@
             <a:spAutoFit/>
           </a:bodyPr>
           <a:lstStyle/>
-          <a:p>
-            <a:pPr algn="ctr">
-              <a:lnSpc>
-                <a:spcPts val="8418"/>
-              </a:lnSpc>
-            </a:pPr>
-            <a:r>
-              <a:rPr lang="en-US" sz="10021">
-                <a:solidFill>
-                  <a:srgbClr val="6E4B37"/>
-                </a:solidFill>
-                <a:latin typeface="Libra Serif Modern"/>
-                <a:ea typeface="Libra Serif Modern"/>
-                <a:cs typeface="Libra Serif Modern"/>
-                <a:sym typeface="Libra Serif Modern"/>
-              </a:rPr>
-              <a:t>METHODOLOGY</a:t>
-            </a:r>
-          </a:p>
+          <a:p/>
         </p:txBody>
       </p:sp>
       <p:sp>
@@ -9856,25 +9728,7 @@
             <a:spAutoFit/>
           </a:bodyPr>
           <a:lstStyle/>
-          <a:p>
-            <a:pPr algn="ctr">
-              <a:lnSpc>
-                <a:spcPts val="3875"/>
-              </a:lnSpc>
-            </a:pPr>
-            <a:r>
-              <a:rPr lang="en-US" sz="3399">
-                <a:solidFill>
-                  <a:srgbClr val="6E4B37"/>
-                </a:solidFill>
-                <a:latin typeface="Arimo"/>
-                <a:ea typeface="Arimo"/>
-                <a:cs typeface="Arimo"/>
-                <a:sym typeface="Arimo"/>
-              </a:rPr>
-              <a:t>Lorem ipsum dolor sit amet, consectetur adipiscing elit. Duis viverra dui mauris, sed hendrerit mi cursus faucibus. Proin accumsan arcu eu tempus molestie. Nulla quis libero scelerisque, hendrerit ex eu, varius metus. Vestibulum scelerisque tellus velit, sed tempus massa venenatis eu. Duis sit amet elementum diam. Cras blandit feugiat arcu, id tempor dui finibus ac. Pellentesque faucibus feugiat nibh vel feugiat.</a:t>
-            </a:r>
-          </a:p>
+          <a:p/>
         </p:txBody>
       </p:sp>
     </p:spTree>
@@ -9960,6 +9814,10 @@
             </a:stretch>
           </a:blipFill>
         </p:spPr>
+        <p:txBody>
+          <a:bodyPr/>
+          <a:p/>
+        </p:txBody>
       </p:sp>
       <p:sp>
         <p:nvSpPr>
@@ -10012,6 +9870,10 @@
             </a:stretch>
           </a:blipFill>
         </p:spPr>
+        <p:txBody>
+          <a:bodyPr/>
+          <a:p/>
+        </p:txBody>
       </p:sp>
       <p:sp>
         <p:nvSpPr>
@@ -10064,6 +9926,10 @@
             </a:stretch>
           </a:blipFill>
         </p:spPr>
+        <p:txBody>
+          <a:bodyPr/>
+          <a:p/>
+        </p:txBody>
       </p:sp>
       <p:sp>
         <p:nvSpPr>
@@ -10116,6 +9982,10 @@
             </a:stretch>
           </a:blipFill>
         </p:spPr>
+        <p:txBody>
+          <a:bodyPr/>
+          <a:p/>
+        </p:txBody>
       </p:sp>
       <p:sp>
         <p:nvSpPr>
@@ -10168,6 +10038,10 @@
             </a:stretch>
           </a:blipFill>
         </p:spPr>
+        <p:txBody>
+          <a:bodyPr/>
+          <a:p/>
+        </p:txBody>
       </p:sp>
       <p:sp>
         <p:nvSpPr>
@@ -10220,6 +10094,10 @@
             </a:stretch>
           </a:blipFill>
         </p:spPr>
+        <p:txBody>
+          <a:bodyPr/>
+          <a:p/>
+        </p:txBody>
       </p:sp>
       <p:sp>
         <p:nvSpPr>
@@ -10272,6 +10150,10 @@
             </a:stretch>
           </a:blipFill>
         </p:spPr>
+        <p:txBody>
+          <a:bodyPr/>
+          <a:p/>
+        </p:txBody>
       </p:sp>
       <p:sp>
         <p:nvSpPr>
@@ -10324,6 +10206,10 @@
             </a:stretch>
           </a:blipFill>
         </p:spPr>
+        <p:txBody>
+          <a:bodyPr/>
+          <a:p/>
+        </p:txBody>
       </p:sp>
       <p:sp>
         <p:nvSpPr>
@@ -10376,6 +10262,10 @@
             </a:stretch>
           </a:blipFill>
         </p:spPr>
+        <p:txBody>
+          <a:bodyPr/>
+          <a:p/>
+        </p:txBody>
       </p:sp>
       <p:sp>
         <p:nvSpPr>
@@ -10428,6 +10318,10 @@
             </a:stretch>
           </a:blipFill>
         </p:spPr>
+        <p:txBody>
+          <a:bodyPr/>
+          <a:p/>
+        </p:txBody>
       </p:sp>
       <p:sp>
         <p:nvSpPr>
@@ -10449,25 +10343,7 @@
             <a:spAutoFit/>
           </a:bodyPr>
           <a:lstStyle/>
-          <a:p>
-            <a:pPr algn="l">
-              <a:lnSpc>
-                <a:spcPts val="8418"/>
-              </a:lnSpc>
-            </a:pPr>
-            <a:r>
-              <a:rPr lang="en-US" sz="10021">
-                <a:solidFill>
-                  <a:srgbClr val="6E4B37"/>
-                </a:solidFill>
-                <a:latin typeface="Libra Serif Modern"/>
-                <a:ea typeface="Libra Serif Modern"/>
-                <a:cs typeface="Libra Serif Modern"/>
-                <a:sym typeface="Libra Serif Modern"/>
-              </a:rPr>
-              <a:t>RESULT</a:t>
-            </a:r>
-          </a:p>
+          <a:p/>
         </p:txBody>
       </p:sp>
       <p:sp>
@@ -10490,51 +10366,9 @@
             <a:spAutoFit/>
           </a:bodyPr>
           <a:lstStyle/>
-          <a:p>
-            <a:pPr algn="l">
-              <a:lnSpc>
-                <a:spcPts val="3875"/>
-              </a:lnSpc>
-            </a:pPr>
-            <a:r>
-              <a:rPr lang="en-US" sz="3399">
-                <a:solidFill>
-                  <a:srgbClr val="6E4B37"/>
-                </a:solidFill>
-                <a:latin typeface="Arimo"/>
-                <a:ea typeface="Arimo"/>
-                <a:cs typeface="Arimo"/>
-                <a:sym typeface="Arimo"/>
-              </a:rPr>
-              <a:t>Lorem ipsum dolor sit amet, consectetur adipiscing elit. Duis viverra dui mauris, sed hendrerit mi cursus faucibus. Proin accumsan arcu eu tempus molestie. Nulla quis libero scelerisque, hendrerit ex eu, varius metus.</a:t>
-            </a:r>
-          </a:p>
-        </p:txBody>
-      </p:sp>
-      <p:pic>
-        <p:nvPicPr>
-          <p:cNvPr name="Picture 14" id="14"/>
-          <p:cNvPicPr>
-            <a:picLocks noChangeAspect="true"/>
-          </p:cNvPicPr>
-          <p:nvPr/>
-        </p:nvPicPr>
-        <p:blipFill>
-          <a:blip r:embed="rId22"/>
-          <a:stretch>
-            <a:fillRect/>
-          </a:stretch>
-        </p:blipFill>
-        <p:spPr>
-          <a:xfrm rot="0">
-            <a:off x="9363248" y="2025659"/>
-            <a:ext cx="6752579" cy="6517453"/>
-          </a:xfrm>
-          <a:prstGeom prst="rect">
-            <a:avLst/>
-          </a:prstGeom>
-        </p:spPr>
-      </p:pic>
+          <a:p/>
+        </p:txBody>
+      </p:sp>
     </p:spTree>
   </p:cSld>
   <p:clrMapOvr>
@@ -10618,6 +10452,10 @@
             </a:stretch>
           </a:blipFill>
         </p:spPr>
+        <p:txBody>
+          <a:bodyPr/>
+          <a:p/>
+        </p:txBody>
       </p:sp>
       <p:sp>
         <p:nvSpPr>
@@ -10670,6 +10508,10 @@
             </a:stretch>
           </a:blipFill>
         </p:spPr>
+        <p:txBody>
+          <a:bodyPr/>
+          <a:p/>
+        </p:txBody>
       </p:sp>
       <p:sp>
         <p:nvSpPr>
@@ -10722,6 +10564,10 @@
             </a:stretch>
           </a:blipFill>
         </p:spPr>
+        <p:txBody>
+          <a:bodyPr/>
+          <a:p/>
+        </p:txBody>
       </p:sp>
       <p:sp>
         <p:nvSpPr>
@@ -10774,6 +10620,10 @@
             </a:stretch>
           </a:blipFill>
         </p:spPr>
+        <p:txBody>
+          <a:bodyPr/>
+          <a:p/>
+        </p:txBody>
       </p:sp>
       <p:sp>
         <p:nvSpPr>
@@ -10826,6 +10676,10 @@
             </a:stretch>
           </a:blipFill>
         </p:spPr>
+        <p:txBody>
+          <a:bodyPr/>
+          <a:p/>
+        </p:txBody>
       </p:sp>
       <p:sp>
         <p:nvSpPr>
@@ -10878,6 +10732,10 @@
             </a:stretch>
           </a:blipFill>
         </p:spPr>
+        <p:txBody>
+          <a:bodyPr/>
+          <a:p/>
+        </p:txBody>
       </p:sp>
       <p:sp>
         <p:nvSpPr>
@@ -10930,6 +10788,10 @@
             </a:stretch>
           </a:blipFill>
         </p:spPr>
+        <p:txBody>
+          <a:bodyPr/>
+          <a:p/>
+        </p:txBody>
       </p:sp>
       <p:sp>
         <p:nvSpPr>
@@ -10982,6 +10844,10 @@
             </a:stretch>
           </a:blipFill>
         </p:spPr>
+        <p:txBody>
+          <a:bodyPr/>
+          <a:p/>
+        </p:txBody>
       </p:sp>
       <p:sp>
         <p:nvSpPr>
@@ -11034,6 +10900,10 @@
             </a:stretch>
           </a:blipFill>
         </p:spPr>
+        <p:txBody>
+          <a:bodyPr/>
+          <a:p/>
+        </p:txBody>
       </p:sp>
       <p:sp>
         <p:nvSpPr>
@@ -11086,6 +10956,10 @@
             </a:stretch>
           </a:blipFill>
         </p:spPr>
+        <p:txBody>
+          <a:bodyPr/>
+          <a:p/>
+        </p:txBody>
       </p:sp>
       <p:sp>
         <p:nvSpPr>
@@ -11107,25 +10981,7 @@
             <a:spAutoFit/>
           </a:bodyPr>
           <a:lstStyle/>
-          <a:p>
-            <a:pPr algn="ctr">
-              <a:lnSpc>
-                <a:spcPts val="8418"/>
-              </a:lnSpc>
-            </a:pPr>
-            <a:r>
-              <a:rPr lang="en-US" sz="10021">
-                <a:solidFill>
-                  <a:srgbClr val="6E4B37"/>
-                </a:solidFill>
-                <a:latin typeface="Libra Serif Modern"/>
-                <a:ea typeface="Libra Serif Modern"/>
-                <a:cs typeface="Libra Serif Modern"/>
-                <a:sym typeface="Libra Serif Modern"/>
-              </a:rPr>
-              <a:t>CONCLUSION</a:t>
-            </a:r>
-          </a:p>
+          <a:p/>
         </p:txBody>
       </p:sp>
       <p:sp>
@@ -11148,25 +11004,7 @@
             <a:spAutoFit/>
           </a:bodyPr>
           <a:lstStyle/>
-          <a:p>
-            <a:pPr algn="ctr">
-              <a:lnSpc>
-                <a:spcPts val="3875"/>
-              </a:lnSpc>
-            </a:pPr>
-            <a:r>
-              <a:rPr lang="en-US" sz="3399">
-                <a:solidFill>
-                  <a:srgbClr val="6E4B37"/>
-                </a:solidFill>
-                <a:latin typeface="Arimo"/>
-                <a:ea typeface="Arimo"/>
-                <a:cs typeface="Arimo"/>
-                <a:sym typeface="Arimo"/>
-              </a:rPr>
-              <a:t>Lorem ipsum dolor sit amet, consectetur adipiscing elit. Duis viverra dui mauris, sed hendrerit mi cursus faucibus. Proin accumsan arcu eu tempus molestie. Nulla quis libero scelerisque, hendrerit ex eu, varius metus. Vestibulum scelerisque tellus velit, sed tempus massa venenatis eu. Duis sit amet elementum diam. Cras blandit feugiat arcu, id tempor dui finibus ac. Pellentesque faucibus feugiat nibh vel feugiat.</a:t>
-            </a:r>
-          </a:p>
+          <a:p/>
         </p:txBody>
       </p:sp>
     </p:spTree>
